--- a/Foundry-RAG-Lab-Sunum.pptx
+++ b/Foundry-RAG-Lab-Sunum.pptx
@@ -2740,7 +2740,7 @@
           <a:p>
             <a:r>
               <a:rPr lang="en-US" dirty="0"/>
-              <a:t>Dördünü tek tek okuma, ikisini seç. lower() örneği en çarpıcısı, çünkü kimse beklemez. IDF sıfır olayı da hibrit mimariyi gerekçelendiriyor.</a:t>
+              <a:t>Dördünü tek tek okuma, ikisini seç. lower() örneği en çarpıcısı, çünkü kimse beklemez. IDF örneği hibrit mimariyi gerekçelendiriyor. Sorulursa: IDF sıfır değil, ama "öğrenci" gibi kalıp sözcükler "burs" gibi konu sözcüklerinin dörtte biri kadar ağırlık taşıyor, yani sorgu kalıp sözcüklerden oluşuyorsa BM25 ayırt edemiyor.</a:t>
             </a:r>
             <a:endParaRPr lang="en-US" dirty="0"/>
           </a:p>
@@ -3763,7 +3763,46 @@
         </p:nvSpPr>
         <p:spPr>
           <a:xfrm>
-            <a:off x="685800" y="4572000"/>
+            <a:off x="685800" y="4553712"/>
+            <a:ext cx="5486400" cy="292608"/>
+          </a:xfrm>
+          <a:prstGeom prst="rect">
+            <a:avLst/>
+          </a:prstGeom>
+          <a:noFill/>
+          <a:ln/>
+        </p:spPr>
+        <p:txBody>
+          <a:bodyPr wrap="square" lIns="0" tIns="0" rIns="0" bIns="0" rtlCol="0" anchor="ctr"/>
+          <a:lstStyle/>
+          <a:p>
+            <a:pPr indent="0" marL="0">
+              <a:buNone/>
+            </a:pPr>
+            <a:r>
+              <a:rPr lang="en-US" sz="1300" dirty="0">
+                <a:solidFill>
+                  <a:srgbClr val="A9BCCC"/>
+                </a:solidFill>
+                <a:latin typeface="Calibri" pitchFamily="34" charset="0"/>
+                <a:ea typeface="Calibri" pitchFamily="34" charset="-122"/>
+                <a:cs typeface="Calibri" pitchFamily="34" charset="-120"/>
+              </a:rPr>
+              <a:t>furkan.ahi@std.bogazici.edu.tr</a:t>
+            </a:r>
+            <a:endParaRPr lang="en-US" sz="1300" dirty="0"/>
+          </a:p>
+        </p:txBody>
+      </p:sp>
+      <p:sp>
+        <p:nvSpPr>
+          <p:cNvPr id="8" name="Text 6"/>
+          <p:cNvSpPr/>
+          <p:nvPr/>
+        </p:nvSpPr>
+        <p:spPr>
+          <a:xfrm>
+            <a:off x="685800" y="4956048"/>
             <a:ext cx="5486400" cy="731520"/>
           </a:xfrm>
           <a:prstGeom prst="rect">
@@ -3819,7 +3858,7 @@
       </p:sp>
       <p:sp>
         <p:nvSpPr>
-          <p:cNvPr id="8" name="Text 6"/>
+          <p:cNvPr id="9" name="Text 7"/>
           <p:cNvSpPr/>
           <p:nvPr/>
         </p:nvSpPr>
@@ -14591,7 +14630,7 @@
                 <a:ea typeface="Calibri" pitchFamily="34" charset="-122"/>
                 <a:cs typeface="Calibri" pitchFamily="34" charset="-120"/>
               </a:rPr>
-              <a:t>Korpus tek kurum, tek dil</a:t>
+              <a:t>Korpus tek kurumdan geliyor</a:t>
             </a:r>
             <a:endParaRPr lang="en-US" sz="1300" dirty="0"/>
           </a:p>
@@ -14633,7 +14672,7 @@
                 <a:ea typeface="Calibri" pitchFamily="34" charset="-122"/>
                 <a:cs typeface="Calibri" pitchFamily="34" charset="-120"/>
               </a:rPr>
-              <a:t>Bulgularımın hepsi Türkçe yönetmelik metnine özgü olabilir. İngilizce bir kontrol seti kurmadım.</a:t>
+              <a:t>Bulgularımın hepsi Türkçe yönetmelik metnine özgü olabilir. Dokuz belgeden biri İngilizce ama İngilizce bir değerlendirme seti kurmadım, yani dil karşılaştırması yapamıyorum.</a:t>
             </a:r>
             <a:endParaRPr lang="en-US" sz="1150" dirty="0"/>
           </a:p>
@@ -16787,7 +16826,46 @@
         </p:nvSpPr>
         <p:spPr>
           <a:xfrm>
-            <a:off x="685800" y="4617720"/>
+            <a:off x="685800" y="4590288"/>
+            <a:ext cx="5486400" cy="292608"/>
+          </a:xfrm>
+          <a:prstGeom prst="rect">
+            <a:avLst/>
+          </a:prstGeom>
+          <a:noFill/>
+          <a:ln/>
+        </p:spPr>
+        <p:txBody>
+          <a:bodyPr wrap="square" lIns="0" tIns="0" rIns="0" bIns="0" rtlCol="0" anchor="ctr"/>
+          <a:lstStyle/>
+          <a:p>
+            <a:pPr indent="0" marL="0">
+              <a:buNone/>
+            </a:pPr>
+            <a:r>
+              <a:rPr lang="en-US" sz="1300" dirty="0">
+                <a:solidFill>
+                  <a:srgbClr val="A9BCCC"/>
+                </a:solidFill>
+                <a:latin typeface="Calibri" pitchFamily="34" charset="0"/>
+                <a:ea typeface="Calibri" pitchFamily="34" charset="-122"/>
+                <a:cs typeface="Calibri" pitchFamily="34" charset="-120"/>
+              </a:rPr>
+              <a:t>furkan.ahi@std.bogazici.edu.tr</a:t>
+            </a:r>
+            <a:endParaRPr lang="en-US" sz="1300" dirty="0"/>
+          </a:p>
+        </p:txBody>
+      </p:sp>
+      <p:sp>
+        <p:nvSpPr>
+          <p:cNvPr id="7" name="Text 5"/>
+          <p:cNvSpPr/>
+          <p:nvPr/>
+        </p:nvSpPr>
+        <p:spPr>
+          <a:xfrm>
+            <a:off x="685800" y="5029200"/>
             <a:ext cx="6400800" cy="685800"/>
           </a:xfrm>
           <a:prstGeom prst="rect">
@@ -18095,7 +18173,7 @@
                           <a:ea typeface="Calibri" pitchFamily="34" charset="-122"/>
                           <a:cs typeface="Calibri" pitchFamily="34" charset="-120"/>
                         </a:rPr>
-                        <a:t>"MADDE" kelimesinin IDF'i sıfır</a:t>
+                        <a:t>Yönetmelik kalıp sözcükleri ayırt etmiyor</a:t>
                       </a:r>
                       <a:endParaRPr lang="en-US" sz="1200" dirty="0">
                         <a:latin typeface="Calibri" charset="0"/>
@@ -18163,7 +18241,7 @@
                           <a:ea typeface="Calibri" pitchFamily="34" charset="-122"/>
                           <a:cs typeface="Calibri" pitchFamily="34" charset="-120"/>
                         </a:rPr>
-                        <a:t>Dokuz belgenin hepsinde, toplam 195 kez geçiyor. BM25'in IDF terimi log(9/9) = 0 veriyor.</a:t>
+                        <a:t>BM25 indeksi 347 chunk üzerinde. "öğrenci" 245 chunk'ta geçiyor, IDF = 0,35; "burs" 24 chunk'ta, IDF = 2,67. Kalıp sözcükler konu sözcüklerinden 4–8 kat az ağırlık taşıyor.</a:t>
                       </a:r>
                       <a:endParaRPr lang="en-US" sz="1200" dirty="0">
                         <a:latin typeface="Calibri" charset="0"/>
@@ -20066,7 +20144,31 @@
                 <a:ea typeface="Calibri" pitchFamily="34" charset="-122"/>
                 <a:cs typeface="Calibri" pitchFamily="34" charset="-120"/>
               </a:rPr>
-              <a:t>214.982 karakter, 347 chunk</a:t>
+              <a:t>214.961 karakter, 347 chunk</a:t>
+            </a:r>
+            <a:endParaRPr lang="en-US" sz="1250" dirty="0"/>
+          </a:p>
+          <a:p>
+            <a:pPr marL="342900" indent="-342900">
+              <a:lnSpc>
+                <a:spcPts val="1900"/>
+              </a:lnSpc>
+              <a:spcAft>
+                <a:spcPts val="500"/>
+              </a:spcAft>
+              <a:buSzPct val="100000"/>
+              <a:buChar char="•"/>
+            </a:pPr>
+            <a:r>
+              <a:rPr lang="en-US" sz="1250" dirty="0">
+                <a:solidFill>
+                  <a:srgbClr val="2C3E4D"/>
+                </a:solidFill>
+                <a:latin typeface="Calibri" pitchFamily="34" charset="0"/>
+                <a:ea typeface="Calibri" pitchFamily="34" charset="-122"/>
+                <a:cs typeface="Calibri" pitchFamily="34" charset="-120"/>
+              </a:rPr>
+              <a:t>8 belge Türkçe, 1 belge İngilizce</a:t>
             </a:r>
             <a:endParaRPr lang="en-US" sz="1250" dirty="0"/>
           </a:p>
